--- a/pitch/Moqawil-Pitch-Deck.pptx
+++ b/pitch/Moqawil-Pitch-Deck.pptx
@@ -4367,7 +4367,7 @@
                 </a:solidFill>
                 <a:latin typeface="Calibri"/>
               </a:rPr>
-              <a:t>• v0.1 (shipped): compliant invoicing, live 80K cap tracker, annual threshold alerts, quarterly declaration generator, bilingual FR/AR RTL UI, one-command Docker self-host.</a:t>
+              <a:t>• v0.2 (shipped): compliant invoicing, live 80K cap tracker, annual threshold alerts, quarterly declaration generator, devis with one-click invoice conversion, DGI-ready UBL 2.1 e-invoicing export, accountant multi-client read-only dashboard, bilingual FR/AR RTL UI (real content translation, not just layout), one-command Docker self-host.</a:t>
             </a:r>
           </a:p>
         </p:txBody>
@@ -4406,7 +4406,7 @@
                 </a:solidFill>
                 <a:latin typeface="Calibri"/>
               </a:rPr>
-              <a:t>• In progress: DGI e-invoicing readiness — UBL 2.1 XML export per invoice.</a:t>
+              <a:t>• Blocked on external access, not engineering work: full DGI/xHub e-invoicing clearance submission and Barid eSign signing integration both require sandbox/account access from the tax authority.</a:t>
             </a:r>
           </a:p>
           <a:p>
@@ -4422,7 +4422,7 @@
                 </a:solidFill>
                 <a:latin typeface="Calibri"/>
               </a:rPr>
-              <a:t>• Next: accountant multi-client dashboard, quote (devis) management, mobile PWA.</a:t>
+              <a:t>• Next: mobile PWA, public launch.</a:t>
             </a:r>
           </a:p>
           <a:p>
@@ -4438,7 +4438,7 @@
                 </a:solidFill>
                 <a:latin typeface="Calibri"/>
               </a:rPr>
-              <a:t>• Distribution: r/Maroc, r/MoroccanDevs, "Auto-entrepreneurs Maroc" FB group (~90K members), chartered-accountant endorsements, Show HN.</a:t>
+              <a:t>• Distribution: r/Maroc, r/MoroccanDevs, “Auto-entrepreneurs Maroc” FB group (~90K members), chartered-accountant endorsements, Show HN.</a:t>
             </a:r>
           </a:p>
         </p:txBody>
@@ -7733,7 +7733,7 @@
           <p:nvPr/>
         </p:nvPicPr>
         <p:blipFill>
-          <a:blip r:embed="rId2"/>
+          <a:blip r:embed="rId4"/>
           <a:stretch>
             <a:fillRect/>
           </a:stretch>
@@ -7801,7 +7801,7 @@
           <p:nvPr/>
         </p:nvPicPr>
         <p:blipFill>
-          <a:blip r:embed="rId3"/>
+          <a:blip r:embed="rId5"/>
           <a:stretch>
             <a:fillRect/>
           </a:stretch>

--- a/pitch/Moqawil-Pitch-Deck.pptx
+++ b/pitch/Moqawil-Pitch-Deck.pptx
@@ -3875,7 +3875,7 @@
                 </a:solidFill>
                 <a:latin typeface="Calibri"/>
               </a:rPr>
-              <a:t>• Cloud managé (post-lancement) : hébergement clé-en-main, sauvegardes, support — payant, optionnel, jamais requis pour utiliser le produit.</a:t>
+              <a:t>• Cloud managé (post-lancement) : hébergement clé-en-main, sauvegardes, support — payant, optionnel, jamais requis pour utiliser le produit. Infrastructure prête (Sprint 11) ; ouverture après revue légale et audit sécurité.</a:t>
             </a:r>
           </a:p>
           <a:p>
@@ -4367,7 +4367,7 @@
                 </a:solidFill>
                 <a:latin typeface="Calibri"/>
               </a:rPr>
-              <a:t>• v0.2 (shipped): compliant invoicing, live 80K cap tracker, annual threshold alerts, quarterly declaration generator, devis with one-click invoice conversion, DGI-ready UBL 2.1 e-invoicing export, accountant multi-client read-only dashboard, bilingual FR/AR RTL UI (real content translation, not just layout), one-command Docker self-host.</a:t>
+              <a:t>• v0.2 (shipped): compliant invoicing, live 80K cap tracker, annual threshold alerts, quarterly declaration generator, devis with one-click invoice conversion, DGI-ready UBL 2.1 e-invoicing export, accountant multi-client read-only dashboard, bilingual FR/AR RTL UI (real content translation, not just layout), one-command Docker self-host. Since v0.2: SaaS-readiness hardening — full IDOR re-audit, sign-in rate limiting, a health-check endpoint, automated backups, and a public FR/AR landing page.</a:t>
             </a:r>
           </a:p>
         </p:txBody>
@@ -4422,7 +4422,7 @@
                 </a:solidFill>
                 <a:latin typeface="Calibri"/>
               </a:rPr>
-              <a:t>• Next: mobile PWA, public launch.</a:t>
+              <a:t>• Next (Sprint 12, planned): Terms of Service, Privacy Policy, CNDP data-controller registration, a third-party security audit, and real infra provisioning — owner-side steps before a public hosted launch. Self-host works today regardless.</a:t>
             </a:r>
           </a:p>
           <a:p>

--- a/pitch/Moqawil-Pitch-Deck.pptx
+++ b/pitch/Moqawil-Pitch-Deck.pptx
@@ -4422,7 +4422,7 @@
                 </a:solidFill>
                 <a:latin typeface="Calibri"/>
               </a:rPr>
-              <a:t>• Next (Sprint 12, planned): Terms of Service, Privacy Policy, CNDP data-controller registration, a third-party security audit, and real infra provisioning — owner-side steps before a public hosted launch. Self-host works today regardless.</a:t>
+              <a:t>• Sprint 12 — launch readiness (shipped 2026-08-12): ToS/Privacy Policy drafts, CNDP data-controller registration checklist, pentest scope doc + security posture summary, full deployment runbook, 3 bilingual SEO blog posts live. What remains is owner-only, not engineering: sign ToS/Privacy with a lawyer, file the CNDP registration, hire a pentest vendor, buy a VPS + domain and deploy, and decide on the 5 drafted announcement posts. Self-host works today regardless.</a:t>
             </a:r>
           </a:p>
           <a:p>

--- a/pitch/Moqawil-Pitch-Deck.pptx
+++ b/pitch/Moqawil-Pitch-Deck.pptx
@@ -3280,7 +3280,7 @@
                 </a:solidFill>
                 <a:latin typeface="Calibri"/>
               </a:rPr>
-              <a:t>Open-source · AGPL-3.0 · FR / دارجة / EN</a:t>
+              <a:t>Open-source · AGPL-3.0 · FR / دارجة / EN · Démo live : preprod.moqawiil.com</a:t>
             </a:r>
           </a:p>
         </p:txBody>
@@ -3664,7 +3664,7 @@
                 </a:solidFill>
                 <a:latin typeface="Calibri"/>
               </a:rPr>
-              <a:t>Moqawil — moqawil.ma (à venir) · github.com/moqawil/moqawil</a:t>
+              <a:t>Moqawil — Démo live : preprod.moqawiil.com · github.com/moqawil/moqawil</a:t>
             </a:r>
           </a:p>
         </p:txBody>
@@ -3875,7 +3875,7 @@
                 </a:solidFill>
                 <a:latin typeface="Calibri"/>
               </a:rPr>
-              <a:t>• Cloud managé (post-lancement) : hébergement clé-en-main, sauvegardes, support — payant, optionnel, jamais requis pour utiliser le produit. Infrastructure prête (Sprint 11) ; ouverture après revue légale et audit sécurité.</a:t>
+              <a:t>• Cloud managé (post-lancement) : hébergement clé-en-main, sauvegardes, support — payant, optionnel, jamais requis pour utiliser le produit. Infrastructure prête et déployée en préproduction — démo live sur preprod.moqawiil.com (Sprint 13) ; ouverture publique après revue légale et audit sécurité.</a:t>
             </a:r>
           </a:p>
           <a:p>
@@ -3926,7 +3926,7 @@
                 </a:solidFill>
                 <a:latin typeface="Calibri"/>
               </a:rPr>
-              <a:t>Moqawil — moqawil.ma (à venir) · github.com/moqawil/moqawil</a:t>
+              <a:t>Moqawil — Démo live : preprod.moqawiil.com · github.com/moqawil/moqawil</a:t>
             </a:r>
           </a:p>
         </p:txBody>
@@ -4188,7 +4188,7 @@
                 </a:solidFill>
                 <a:latin typeface="Calibri"/>
               </a:rPr>
-              <a:t>Moqawil — moqawil.ma (à venir) · github.com/moqawil/moqawil</a:t>
+              <a:t>Moqawil — Démo live : preprod.moqawiil.com · github.com/moqawil/moqawil</a:t>
             </a:r>
           </a:p>
         </p:txBody>
@@ -4422,7 +4422,7 @@
                 </a:solidFill>
                 <a:latin typeface="Calibri"/>
               </a:rPr>
-              <a:t>• Sprint 12 — launch readiness (shipped 2026-08-12): ToS/Privacy Policy drafts, CNDP data-controller registration checklist, pentest scope doc + security posture summary, full deployment runbook, 3 bilingual SEO blog posts live. What remains is owner-only, not engineering: sign ToS/Privacy with a lawyer, file the CNDP registration, hire a pentest vendor, buy a VPS + domain and deploy, and decide on the 5 drafted announcement posts. Self-host works today regardless.</a:t>
+              <a:t>• Sprint 12 — launch readiness (shipped 2026-08-12): ToS/Privacy Policy drafts, CNDP data-controller registration checklist, pentest scope doc + security posture summary, full deployment runbook, 3 bilingual SEO blog posts live. What remains is owner-only, not engineering: sign ToS/Privacy with a lawyer, file the CNDP registration, hire a pentest vendor, and decide on the 5 drafted announcement posts. Self-host works today regardless.</a:t>
             </a:r>
           </a:p>
           <a:p>
@@ -4438,6 +4438,22 @@
                 </a:solidFill>
                 <a:latin typeface="Calibri"/>
               </a:rPr>
+              <a:t>• Sprint 13 (shipped): CI/CD pipeline to a live preprod deploy on a real VPS + domain — try it yourself at preprod.moqawiil.com.</a:t>
+            </a:r>
+          </a:p>
+          <a:p>
+            <a:pPr algn="l">
+              <a:spcAft>
+                <a:spcPts val="1400"/>
+              </a:spcAft>
+            </a:pPr>
+            <a:r>
+              <a:rPr sz="1700">
+                <a:solidFill>
+                  <a:srgbClr val="1A1A1A"/>
+                </a:solidFill>
+                <a:latin typeface="Calibri"/>
+              </a:rPr>
               <a:t>• Distribution: r/Maroc, r/MoroccanDevs, “Auto-entrepreneurs Maroc” FB group (~90K members), chartered-accountant endorsements, Show HN.</a:t>
             </a:r>
           </a:p>
@@ -4473,7 +4489,7 @@
                 </a:solidFill>
                 <a:latin typeface="Calibri"/>
               </a:rPr>
-              <a:t>Moqawil — moqawil.ma (à venir) · github.com/moqawil/moqawil</a:t>
+              <a:t>Moqawil — Démo live : preprod.moqawiil.com · github.com/moqawil/moqawil</a:t>
             </a:r>
           </a:p>
         </p:txBody>
@@ -4588,7 +4604,7 @@
                   <a:srgbClr val="FFFFFF"/>
                 </a:solidFill>
               </a:rPr>
-              <a:t>[FR]  Utilise Moqawil si tu factures en freelance — c'est fait pour toi.</a:t>
+              <a:t>[FR]  Utilise Moqawil si tu factures en freelance — essaie la démo live sur preprod.moqawiil.com.</a:t>
             </a:r>
           </a:p>
         </p:txBody>
@@ -4731,7 +4747,7 @@
                 </a:solidFill>
                 <a:latin typeface="Calibri"/>
               </a:rPr>
-              <a:t>Moqawil — github.com/moqawil/moqawil</a:t>
+              <a:t>Moqawil — preprod.moqawiil.com · github.com/moqawil/moqawil</a:t>
             </a:r>
           </a:p>
         </p:txBody>
@@ -4862,7 +4878,7 @@
                 </a:solidFill>
                 <a:latin typeface="Calibri"/>
               </a:rPr>
-              <a:t>github.com/moqawil/moqawil  ·  AGPL-3.0  ·  Built for the ~400,000 Moroccans who deserve better tools.</a:t>
+              <a:t>github.com/moqawil/moqawil  ·  preprod.moqawiil.com  ·  AGPL-3.0  ·  Built for the ~400,000 Moroccans who deserve better tools.</a:t>
             </a:r>
           </a:p>
         </p:txBody>
@@ -5175,7 +5191,7 @@
                 </a:solidFill>
                 <a:latin typeface="Calibri"/>
               </a:rPr>
-              <a:t>Moqawil — moqawil.ma (à venir) · github.com/moqawil/moqawil</a:t>
+              <a:t>Moqawil — Démo live : preprod.moqawiil.com · github.com/moqawil/moqawil</a:t>
             </a:r>
           </a:p>
         </p:txBody>
@@ -5488,7 +5504,7 @@
                 </a:solidFill>
                 <a:latin typeface="Calibri"/>
               </a:rPr>
-              <a:t>Moqawil — moqawil.ma (à venir) · github.com/moqawil/moqawil</a:t>
+              <a:t>Moqawil — Démo live : preprod.moqawiil.com · github.com/moqawil/moqawil</a:t>
             </a:r>
           </a:p>
         </p:txBody>
@@ -5923,7 +5939,7 @@
                 </a:solidFill>
                 <a:latin typeface="Calibri"/>
               </a:rPr>
-              <a:t>Moqawil — moqawil.ma (à venir) · github.com/moqawil/moqawil</a:t>
+              <a:t>Moqawil — Démo live : preprod.moqawiil.com · github.com/moqawil/moqawil</a:t>
             </a:r>
           </a:p>
         </p:txBody>
@@ -6367,7 +6383,7 @@
                 </a:solidFill>
                 <a:latin typeface="Calibri"/>
               </a:rPr>
-              <a:t>Moqawil — moqawil.ma (à venir) · github.com/moqawil/moqawil</a:t>
+              <a:t>Moqawil — Démo live : preprod.moqawiil.com · github.com/moqawil/moqawil</a:t>
             </a:r>
           </a:p>
         </p:txBody>
@@ -7579,7 +7595,7 @@
                 </a:solidFill>
                 <a:latin typeface="Calibri"/>
               </a:rPr>
-              <a:t>Moqawil — moqawil.ma (à venir) · github.com/moqawil/moqawil</a:t>
+              <a:t>Moqawil — Démo live : preprod.moqawiil.com · github.com/moqawil/moqawil</a:t>
             </a:r>
           </a:p>
         </p:txBody>
@@ -7724,30 +7740,6 @@
           </a:p>
         </p:txBody>
       </p:sp>
-      <p:pic>
-        <p:nvPicPr>
-          <p:cNvPr id="5" name="Picture 4" descr="04-dashboard.png"/>
-          <p:cNvPicPr>
-            <a:picLocks noChangeAspect="1"/>
-          </p:cNvPicPr>
-          <p:nvPr/>
-        </p:nvPicPr>
-        <p:blipFill>
-          <a:blip r:embed="rId4"/>
-          <a:stretch>
-            <a:fillRect/>
-          </a:stretch>
-        </p:blipFill>
-        <p:spPr>
-          <a:xfrm>
-            <a:off x="548640" y="1554480"/>
-            <a:ext cx="5120640" cy="2880360"/>
-          </a:xfrm>
-          <a:prstGeom prst="rect">
-            <a:avLst/>
-          </a:prstGeom>
-        </p:spPr>
-      </p:pic>
       <p:sp>
         <p:nvSpPr>
           <p:cNvPr id="6" name="Rectangle 5"/>
@@ -7792,30 +7784,6 @@
           </a:p>
         </p:txBody>
       </p:sp>
-      <p:pic>
-        <p:nvPicPr>
-          <p:cNvPr id="7" name="Picture 6" descr="05-dashboard-arabic-rtl.png"/>
-          <p:cNvPicPr>
-            <a:picLocks noChangeAspect="1"/>
-          </p:cNvPicPr>
-          <p:nvPr/>
-        </p:nvPicPr>
-        <p:blipFill>
-          <a:blip r:embed="rId5"/>
-          <a:stretch>
-            <a:fillRect/>
-          </a:stretch>
-        </p:blipFill>
-        <p:spPr>
-          <a:xfrm>
-            <a:off x="6035040" y="1554480"/>
-            <a:ext cx="5120640" cy="2880360"/>
-          </a:xfrm>
-          <a:prstGeom prst="rect">
-            <a:avLst/>
-          </a:prstGeom>
-        </p:spPr>
-      </p:pic>
       <p:sp>
         <p:nvSpPr>
           <p:cNvPr id="8" name="Rectangle 7"/>
@@ -7925,7 +7893,7 @@
                 </a:solidFill>
                 <a:latin typeface="Calibri"/>
               </a:rPr>
-              <a:t>لوحة القيادة — العربية (RTL)</a:t>
+              <a:t>العملاء — بالعربية (RTL)</a:t>
             </a:r>
           </a:p>
         </p:txBody>
@@ -7960,11 +7928,59 @@
                 </a:solidFill>
                 <a:latin typeface="Calibri"/>
               </a:rPr>
-              <a:t>Moqawil — moqawil.ma (à venir) · github.com/moqawil/moqawil</a:t>
-            </a:r>
-          </a:p>
-        </p:txBody>
-      </p:sp>
+              <a:t>Moqawil — Démo live : preprod.moqawiil.com · github.com/moqawil/moqawil</a:t>
+            </a:r>
+          </a:p>
+        </p:txBody>
+      </p:sp>
+      <p:pic>
+        <p:nvPicPr>
+          <p:cNvPr id="12" name="Picture 11" descr="slide7_left.png"/>
+          <p:cNvPicPr>
+            <a:picLocks noChangeAspect="1"/>
+          </p:cNvPicPr>
+          <p:nvPr/>
+        </p:nvPicPr>
+        <p:blipFill>
+          <a:blip r:embed="rId6"/>
+          <a:stretch>
+            <a:fillRect/>
+          </a:stretch>
+        </p:blipFill>
+        <p:spPr>
+          <a:xfrm>
+            <a:off x="548640" y="1554480"/>
+            <a:ext cx="5120640" cy="2880360"/>
+          </a:xfrm>
+          <a:prstGeom prst="rect">
+            <a:avLst/>
+          </a:prstGeom>
+        </p:spPr>
+      </p:pic>
+      <p:pic>
+        <p:nvPicPr>
+          <p:cNvPr id="13" name="Picture 12" descr="slide7_right.png"/>
+          <p:cNvPicPr>
+            <a:picLocks noChangeAspect="1"/>
+          </p:cNvPicPr>
+          <p:nvPr/>
+        </p:nvPicPr>
+        <p:blipFill>
+          <a:blip r:embed="rId7"/>
+          <a:stretch>
+            <a:fillRect/>
+          </a:stretch>
+        </p:blipFill>
+        <p:spPr>
+          <a:xfrm>
+            <a:off x="6035040" y="1554480"/>
+            <a:ext cx="5120640" cy="2880360"/>
+          </a:xfrm>
+          <a:prstGeom prst="rect">
+            <a:avLst/>
+          </a:prstGeom>
+        </p:spPr>
+      </p:pic>
     </p:spTree>
   </p:cSld>
   <p:clrMapOvr>
@@ -8105,30 +8121,6 @@
           </a:p>
         </p:txBody>
       </p:sp>
-      <p:pic>
-        <p:nvPicPr>
-          <p:cNvPr id="5" name="Picture 4" descr="10-client-detail-cap-badge.png"/>
-          <p:cNvPicPr>
-            <a:picLocks noChangeAspect="1"/>
-          </p:cNvPicPr>
-          <p:nvPr/>
-        </p:nvPicPr>
-        <p:blipFill>
-          <a:blip r:embed="rId2"/>
-          <a:stretch>
-            <a:fillRect/>
-          </a:stretch>
-        </p:blipFill>
-        <p:spPr>
-          <a:xfrm>
-            <a:off x="548640" y="1554480"/>
-            <a:ext cx="5120640" cy="2880360"/>
-          </a:xfrm>
-          <a:prstGeom prst="rect">
-            <a:avLst/>
-          </a:prstGeom>
-        </p:spPr>
-      </p:pic>
       <p:sp>
         <p:nvSpPr>
           <p:cNvPr id="6" name="Rectangle 5"/>
@@ -8173,30 +8165,6 @@
           </a:p>
         </p:txBody>
       </p:sp>
-      <p:pic>
-        <p:nvPicPr>
-          <p:cNvPr id="7" name="Picture 6" descr="21-cap-over-limit-dialog.png"/>
-          <p:cNvPicPr>
-            <a:picLocks noChangeAspect="1"/>
-          </p:cNvPicPr>
-          <p:nvPr/>
-        </p:nvPicPr>
-        <p:blipFill>
-          <a:blip r:embed="rId3"/>
-          <a:stretch>
-            <a:fillRect/>
-          </a:stretch>
-        </p:blipFill>
-        <p:spPr>
-          <a:xfrm>
-            <a:off x="6035040" y="1554480"/>
-            <a:ext cx="5120640" cy="2880360"/>
-          </a:xfrm>
-          <a:prstGeom prst="rect">
-            <a:avLst/>
-          </a:prstGeom>
-        </p:spPr>
-      </p:pic>
       <p:sp>
         <p:nvSpPr>
           <p:cNvPr id="8" name="Rectangle 7"/>
@@ -8271,7 +8239,7 @@
                 </a:solidFill>
                 <a:latin typeface="Calibri"/>
               </a:rPr>
-              <a:t>Fiche client — badge de plafond en temps réel</a:t>
+              <a:t>Liste clients — badge de plafond en temps réel</a:t>
             </a:r>
           </a:p>
         </p:txBody>
@@ -8341,11 +8309,59 @@
                 </a:solidFill>
                 <a:latin typeface="Calibri"/>
               </a:rPr>
-              <a:t>Moqawil — moqawil.ma (à venir) · github.com/moqawil/moqawil</a:t>
-            </a:r>
-          </a:p>
-        </p:txBody>
-      </p:sp>
+              <a:t>Moqawil — Démo live : preprod.moqawiil.com · github.com/moqawil/moqawil</a:t>
+            </a:r>
+          </a:p>
+        </p:txBody>
+      </p:sp>
+      <p:pic>
+        <p:nvPicPr>
+          <p:cNvPr id="12" name="Picture 11" descr="slide8_left.png"/>
+          <p:cNvPicPr>
+            <a:picLocks noChangeAspect="1"/>
+          </p:cNvPicPr>
+          <p:nvPr/>
+        </p:nvPicPr>
+        <p:blipFill>
+          <a:blip r:embed="rId4"/>
+          <a:stretch>
+            <a:fillRect/>
+          </a:stretch>
+        </p:blipFill>
+        <p:spPr>
+          <a:xfrm>
+            <a:off x="548640" y="1554480"/>
+            <a:ext cx="5120640" cy="2880360"/>
+          </a:xfrm>
+          <a:prstGeom prst="rect">
+            <a:avLst/>
+          </a:prstGeom>
+        </p:spPr>
+      </p:pic>
+      <p:pic>
+        <p:nvPicPr>
+          <p:cNvPr id="13" name="Picture 12" descr="slide8_right.png"/>
+          <p:cNvPicPr>
+            <a:picLocks noChangeAspect="1"/>
+          </p:cNvPicPr>
+          <p:nvPr/>
+        </p:nvPicPr>
+        <p:blipFill>
+          <a:blip r:embed="rId5"/>
+          <a:stretch>
+            <a:fillRect/>
+          </a:stretch>
+        </p:blipFill>
+        <p:spPr>
+          <a:xfrm>
+            <a:off x="6035040" y="1554480"/>
+            <a:ext cx="5120640" cy="2880360"/>
+          </a:xfrm>
+          <a:prstGeom prst="rect">
+            <a:avLst/>
+          </a:prstGeom>
+        </p:spPr>
+      </p:pic>
     </p:spTree>
   </p:cSld>
   <p:clrMapOvr>
@@ -8486,30 +8502,6 @@
           </a:p>
         </p:txBody>
       </p:sp>
-      <p:pic>
-        <p:nvPicPr>
-          <p:cNvPr id="5" name="Picture 4" descr="12-invoice-new-filled.png"/>
-          <p:cNvPicPr>
-            <a:picLocks noChangeAspect="1"/>
-          </p:cNvPicPr>
-          <p:nvPr/>
-        </p:nvPicPr>
-        <p:blipFill>
-          <a:blip r:embed="rId2"/>
-          <a:stretch>
-            <a:fillRect/>
-          </a:stretch>
-        </p:blipFill>
-        <p:spPr>
-          <a:xfrm>
-            <a:off x="548640" y="1554480"/>
-            <a:ext cx="5120640" cy="2880360"/>
-          </a:xfrm>
-          <a:prstGeom prst="rect">
-            <a:avLst/>
-          </a:prstGeom>
-        </p:spPr>
-      </p:pic>
       <p:sp>
         <p:nvSpPr>
           <p:cNvPr id="6" name="Rectangle 5"/>
@@ -8554,30 +8546,6 @@
           </a:p>
         </p:txBody>
       </p:sp>
-      <p:pic>
-        <p:nvPicPr>
-          <p:cNvPr id="7" name="Picture 6" descr="19-declarations-generated.png"/>
-          <p:cNvPicPr>
-            <a:picLocks noChangeAspect="1"/>
-          </p:cNvPicPr>
-          <p:nvPr/>
-        </p:nvPicPr>
-        <p:blipFill>
-          <a:blip r:embed="rId3"/>
-          <a:stretch>
-            <a:fillRect/>
-          </a:stretch>
-        </p:blipFill>
-        <p:spPr>
-          <a:xfrm>
-            <a:off x="6035040" y="1554480"/>
-            <a:ext cx="5120640" cy="2880360"/>
-          </a:xfrm>
-          <a:prstGeom prst="rect">
-            <a:avLst/>
-          </a:prstGeom>
-        </p:spPr>
-      </p:pic>
       <p:sp>
         <p:nvSpPr>
           <p:cNvPr id="8" name="Rectangle 7"/>
@@ -8722,11 +8690,59 @@
                 </a:solidFill>
                 <a:latin typeface="Calibri"/>
               </a:rPr>
-              <a:t>Moqawil — moqawil.ma (à venir) · github.com/moqawil/moqawil</a:t>
-            </a:r>
-          </a:p>
-        </p:txBody>
-      </p:sp>
+              <a:t>Moqawil — Démo live : preprod.moqawiil.com · github.com/moqawil/moqawil</a:t>
+            </a:r>
+          </a:p>
+        </p:txBody>
+      </p:sp>
+      <p:pic>
+        <p:nvPicPr>
+          <p:cNvPr id="12" name="Picture 11" descr="slide9_left.png"/>
+          <p:cNvPicPr>
+            <a:picLocks noChangeAspect="1"/>
+          </p:cNvPicPr>
+          <p:nvPr/>
+        </p:nvPicPr>
+        <p:blipFill>
+          <a:blip r:embed="rId4"/>
+          <a:stretch>
+            <a:fillRect/>
+          </a:stretch>
+        </p:blipFill>
+        <p:spPr>
+          <a:xfrm>
+            <a:off x="548640" y="1554480"/>
+            <a:ext cx="5120640" cy="2880360"/>
+          </a:xfrm>
+          <a:prstGeom prst="rect">
+            <a:avLst/>
+          </a:prstGeom>
+        </p:spPr>
+      </p:pic>
+      <p:pic>
+        <p:nvPicPr>
+          <p:cNvPr id="13" name="Picture 12" descr="slide9_right.png"/>
+          <p:cNvPicPr>
+            <a:picLocks noChangeAspect="1"/>
+          </p:cNvPicPr>
+          <p:nvPr/>
+        </p:nvPicPr>
+        <p:blipFill>
+          <a:blip r:embed="rId5"/>
+          <a:stretch>
+            <a:fillRect/>
+          </a:stretch>
+        </p:blipFill>
+        <p:spPr>
+          <a:xfrm>
+            <a:off x="6035040" y="1554480"/>
+            <a:ext cx="5120640" cy="2880360"/>
+          </a:xfrm>
+          <a:prstGeom prst="rect">
+            <a:avLst/>
+          </a:prstGeom>
+        </p:spPr>
+      </p:pic>
     </p:spTree>
   </p:cSld>
   <p:clrMapOvr>
